--- a/media/resources/files/Onduktar_KoboytuuBoluuJenilOrtoOOR.pptx
+++ b/media/resources/files/Onduktar_KoboytuuBoluuJenilOrtoOOR.pptx
@@ -8629,7 +8629,7 @@
                 <a:ea typeface="+mn-ea"/>
                 <a:cs typeface="+mn-cs"/>
               </a:rPr>
-              <a:t>Турдуу пикирлер учун ыраазычылык билдиребиз.</a:t>
+              <a:t>Түрдүү пикирлер үчүн ыраазычылык билдиребиз.</a:t>
             </a:r>
           </a:p>
           <a:p>

--- a/media/resources/files/Onduktar_KoboytuuBoluuJenilOrtoOOR.pptx
+++ b/media/resources/files/Onduktar_KoboytuuBoluuJenilOrtoOOR.pptx
@@ -2105,7 +2105,7 @@
           <a:p>
             <a:r>
               <a:rPr lang="en-GB" sz="2000" dirty="0"/>
-              <a:t>2 × 0.3   =</a:t>
+              <a:t>2 × 0,3   =</a:t>
             </a:r>
           </a:p>
         </p:txBody>
@@ -2181,7 +2181,7 @@
           <a:p>
             <a:r>
               <a:rPr lang="en-GB" sz="2000" dirty="0"/>
-              <a:t>2 × 0.7   = </a:t>
+              <a:t>2 × 0,7   = </a:t>
             </a:r>
           </a:p>
         </p:txBody>
@@ -2257,7 +2257,7 @@
           <a:p>
             <a:r>
               <a:rPr lang="en-GB" sz="2000" dirty="0"/>
-              <a:t>3 × 0.7   =</a:t>
+              <a:t>3 × 0,7   =</a:t>
             </a:r>
           </a:p>
         </p:txBody>
@@ -2333,7 +2333,7 @@
           <a:p>
             <a:r>
               <a:rPr lang="en-GB" sz="2000" dirty="0"/>
-              <a:t>0.8 × 4  =</a:t>
+              <a:t>0,8 × 4  =</a:t>
             </a:r>
           </a:p>
         </p:txBody>
@@ -2409,7 +2409,7 @@
           <a:p>
             <a:r>
               <a:rPr lang="en-GB" sz="2000" dirty="0"/>
-              <a:t>1.1 × 6  =</a:t>
+              <a:t>1,1 × 6  =</a:t>
             </a:r>
           </a:p>
         </p:txBody>
@@ -2485,7 +2485,7 @@
           <a:p>
             <a:r>
               <a:rPr lang="en-GB" sz="2000" dirty="0"/>
-              <a:t>2.4 × 2  =</a:t>
+              <a:t>2,4 × 2  =</a:t>
             </a:r>
           </a:p>
         </p:txBody>
@@ -2561,7 +2561,7 @@
           <a:p>
             <a:r>
               <a:rPr lang="en-GB" sz="2000" dirty="0"/>
-              <a:t>3 × 2.6  =</a:t>
+              <a:t>3 × 2,6  =</a:t>
             </a:r>
           </a:p>
         </p:txBody>
@@ -2678,7 +2678,7 @@
           <a:p>
             <a:r>
               <a:rPr lang="en-GB" sz="2000" dirty="0"/>
-              <a:t>0.3 × 0.3  =</a:t>
+              <a:t>0,3 × 0,3  =</a:t>
             </a:r>
           </a:p>
         </p:txBody>
@@ -2754,7 +2754,7 @@
           <a:p>
             <a:r>
               <a:rPr lang="en-GB" sz="2000" dirty="0"/>
-              <a:t>0.5 × 0.7  =</a:t>
+              <a:t>0,5 × 0,7  =</a:t>
             </a:r>
           </a:p>
         </p:txBody>
@@ -2830,7 +2830,7 @@
           <a:p>
             <a:r>
               <a:rPr lang="en-GB" sz="2000" dirty="0"/>
-              <a:t>0.4 × 0.5  =</a:t>
+              <a:t>0,4 × 0,5  =</a:t>
             </a:r>
           </a:p>
         </p:txBody>
@@ -2906,7 +2906,7 @@
           <a:p>
             <a:r>
               <a:rPr lang="en-GB" sz="2000" dirty="0"/>
-              <a:t>1.2 × 0.3  =</a:t>
+              <a:t>1,2 × 0,3  =</a:t>
             </a:r>
           </a:p>
         </p:txBody>
@@ -2982,7 +2982,7 @@
           <a:p>
             <a:r>
               <a:rPr lang="en-GB" sz="2000" dirty="0"/>
-              <a:t>0.4 × 1.6  =</a:t>
+              <a:t>0,4 × 1,6  =</a:t>
             </a:r>
           </a:p>
         </p:txBody>
@@ -3058,7 +3058,7 @@
           <a:p>
             <a:r>
               <a:rPr lang="en-GB" sz="2000" dirty="0"/>
-              <a:t>1.2 × 1.3  =</a:t>
+              <a:t>1,2 × 1,3  =</a:t>
             </a:r>
           </a:p>
         </p:txBody>
@@ -3134,7 +3134,7 @@
           <a:p>
             <a:r>
               <a:rPr lang="en-GB" sz="2000" dirty="0"/>
-              <a:t>2.7 × 1.1  =</a:t>
+              <a:t>2,7 × 1,1  =</a:t>
             </a:r>
           </a:p>
         </p:txBody>
@@ -3251,7 +3251,7 @@
           <a:p>
             <a:r>
               <a:rPr lang="en-GB" sz="2000" dirty="0"/>
-              <a:t>1.2 × 0.7  =</a:t>
+              <a:t>1,2 × 0,7  =</a:t>
             </a:r>
           </a:p>
         </p:txBody>
@@ -3327,7 +3327,7 @@
           <a:p>
             <a:r>
               <a:rPr lang="en-GB" sz="2000" dirty="0"/>
-              <a:t>1.4 × 1.8  =</a:t>
+              <a:t>1,4 × 1,8  =</a:t>
             </a:r>
           </a:p>
         </p:txBody>
@@ -3403,7 +3403,7 @@
           <a:p>
             <a:r>
               <a:rPr lang="en-GB" sz="2000" dirty="0"/>
-              <a:t>0.2 × 0.16  =</a:t>
+              <a:t>0,2 × 0,16  =</a:t>
             </a:r>
           </a:p>
         </p:txBody>
@@ -3479,7 +3479,7 @@
           <a:p>
             <a:r>
               <a:rPr lang="en-GB" sz="2000" dirty="0"/>
-              <a:t>1.6 × 0.05  =</a:t>
+              <a:t>1,6 × 0,05  =</a:t>
             </a:r>
           </a:p>
         </p:txBody>
@@ -3555,7 +3555,7 @@
           <a:p>
             <a:r>
               <a:rPr lang="en-GB" sz="2000" dirty="0"/>
-              <a:t>2.2 × 0.15  =</a:t>
+              <a:t>2,2 × 0,15  =</a:t>
             </a:r>
           </a:p>
         </p:txBody>
@@ -3631,7 +3631,7 @@
           <a:p>
             <a:r>
               <a:rPr lang="en-GB" sz="2000" dirty="0"/>
-              <a:t>1.24 × 0.6  =</a:t>
+              <a:t>1,24 × 0,6  =</a:t>
             </a:r>
           </a:p>
         </p:txBody>
@@ -3707,7 +3707,7 @@
           <a:p>
             <a:r>
               <a:rPr lang="en-GB" sz="2000" dirty="0"/>
-              <a:t>2.21 × 3.5  =</a:t>
+              <a:t>2,21 × 3,5  =</a:t>
             </a:r>
           </a:p>
         </p:txBody>
@@ -4345,7 +4345,7 @@
           <a:p>
             <a:r>
               <a:rPr lang="en-GB" sz="2000" dirty="0"/>
-              <a:t>2 × 0.3  =</a:t>
+              <a:t>2 × 0,3  =</a:t>
             </a:r>
           </a:p>
         </p:txBody>
@@ -4388,7 +4388,7 @@
             <a:pPr algn="ctr"/>
             <a:r>
               <a:rPr lang="en-GB" sz="2000" dirty="0"/>
-              <a:t>0.6</a:t>
+              <a:t>0,6</a:t>
             </a:r>
           </a:p>
         </p:txBody>
@@ -4464,7 +4464,7 @@
           <a:p>
             <a:r>
               <a:rPr lang="en-GB" sz="2000" dirty="0"/>
-              <a:t>2 × 0.7  =</a:t>
+              <a:t>2 × 0,7  =</a:t>
             </a:r>
           </a:p>
         </p:txBody>
@@ -4507,7 +4507,7 @@
             <a:pPr algn="ctr"/>
             <a:r>
               <a:rPr lang="en-GB" sz="2000" dirty="0"/>
-              <a:t>1.4</a:t>
+              <a:t>1,4</a:t>
             </a:r>
           </a:p>
         </p:txBody>
@@ -4583,7 +4583,7 @@
           <a:p>
             <a:r>
               <a:rPr lang="en-GB" sz="2000" dirty="0"/>
-              <a:t>3 × 0.7  =</a:t>
+              <a:t>3 × 0,7  =</a:t>
             </a:r>
           </a:p>
         </p:txBody>
@@ -4626,7 +4626,7 @@
             <a:pPr algn="ctr"/>
             <a:r>
               <a:rPr lang="en-GB" sz="2000" dirty="0"/>
-              <a:t>2.1</a:t>
+              <a:t>2,1</a:t>
             </a:r>
           </a:p>
         </p:txBody>
@@ -4702,7 +4702,7 @@
           <a:p>
             <a:r>
               <a:rPr lang="en-GB" sz="2000" dirty="0"/>
-              <a:t>0.8 × 4  =</a:t>
+              <a:t>0,8 × 4  =</a:t>
             </a:r>
           </a:p>
         </p:txBody>
@@ -4745,7 +4745,7 @@
             <a:pPr algn="ctr"/>
             <a:r>
               <a:rPr lang="en-GB" sz="2000" dirty="0"/>
-              <a:t>3.2</a:t>
+              <a:t>3,2</a:t>
             </a:r>
           </a:p>
         </p:txBody>
@@ -4821,7 +4821,7 @@
           <a:p>
             <a:r>
               <a:rPr lang="en-GB" sz="2000" dirty="0"/>
-              <a:t>1.1 × 6  =</a:t>
+              <a:t>1,1 × 6  =</a:t>
             </a:r>
           </a:p>
         </p:txBody>
@@ -4864,7 +4864,7 @@
             <a:pPr algn="ctr"/>
             <a:r>
               <a:rPr lang="en-GB" sz="2000" dirty="0"/>
-              <a:t>6.6</a:t>
+              <a:t>6,6</a:t>
             </a:r>
           </a:p>
         </p:txBody>
@@ -4940,7 +4940,7 @@
           <a:p>
             <a:r>
               <a:rPr lang="en-GB" sz="2000" dirty="0"/>
-              <a:t>2.4 × 2  =</a:t>
+              <a:t>2,4 × 2  =</a:t>
             </a:r>
           </a:p>
         </p:txBody>
@@ -4983,7 +4983,7 @@
             <a:pPr algn="ctr"/>
             <a:r>
               <a:rPr lang="en-GB" sz="2000" dirty="0"/>
-              <a:t>4.8</a:t>
+              <a:t>4,8</a:t>
             </a:r>
           </a:p>
         </p:txBody>
@@ -5059,7 +5059,7 @@
           <a:p>
             <a:r>
               <a:rPr lang="en-GB" sz="2000" dirty="0"/>
-              <a:t>3 × 2.6  =</a:t>
+              <a:t>3 × 2,6  =</a:t>
             </a:r>
           </a:p>
         </p:txBody>
@@ -5102,7 +5102,7 @@
             <a:pPr algn="ctr"/>
             <a:r>
               <a:rPr lang="en-GB" sz="2000" dirty="0"/>
-              <a:t>7.8</a:t>
+              <a:t>7,8</a:t>
             </a:r>
           </a:p>
         </p:txBody>
@@ -5219,7 +5219,7 @@
           <a:p>
             <a:r>
               <a:rPr lang="en-GB" sz="2000" dirty="0"/>
-              <a:t>0.3 × 0.3  =</a:t>
+              <a:t>0,3 × 0,3  =</a:t>
             </a:r>
           </a:p>
         </p:txBody>
@@ -5262,7 +5262,7 @@
             <a:pPr algn="ctr"/>
             <a:r>
               <a:rPr lang="en-GB" sz="2000" dirty="0"/>
-              <a:t>0.09</a:t>
+              <a:t>0,09</a:t>
             </a:r>
           </a:p>
         </p:txBody>
@@ -5338,7 +5338,7 @@
           <a:p>
             <a:r>
               <a:rPr lang="en-GB" sz="2000" dirty="0"/>
-              <a:t>0.5 × 0.7  =</a:t>
+              <a:t>0,5 × 0,7  =</a:t>
             </a:r>
           </a:p>
         </p:txBody>
@@ -5381,7 +5381,7 @@
             <a:pPr algn="ctr"/>
             <a:r>
               <a:rPr lang="en-GB" sz="2000" dirty="0"/>
-              <a:t>0.35</a:t>
+              <a:t>0,35</a:t>
             </a:r>
           </a:p>
         </p:txBody>
@@ -5457,7 +5457,7 @@
           <a:p>
             <a:r>
               <a:rPr lang="en-GB" sz="2000" dirty="0"/>
-              <a:t>0.4 × 0.5  =</a:t>
+              <a:t>0,4 × 0,5  =</a:t>
             </a:r>
           </a:p>
         </p:txBody>
@@ -5500,7 +5500,7 @@
             <a:pPr algn="ctr"/>
             <a:r>
               <a:rPr lang="en-GB" sz="2000" dirty="0"/>
-              <a:t>0.2</a:t>
+              <a:t>0,2</a:t>
             </a:r>
           </a:p>
         </p:txBody>
@@ -5576,7 +5576,7 @@
           <a:p>
             <a:r>
               <a:rPr lang="en-GB" sz="2000" dirty="0"/>
-              <a:t>1.2 × 0.3  =</a:t>
+              <a:t>1,2 × 0,3  =</a:t>
             </a:r>
           </a:p>
         </p:txBody>
@@ -5619,7 +5619,7 @@
             <a:pPr algn="ctr"/>
             <a:r>
               <a:rPr lang="en-GB" sz="2000" dirty="0"/>
-              <a:t>0.36</a:t>
+              <a:t>0,36</a:t>
             </a:r>
           </a:p>
         </p:txBody>
@@ -5695,7 +5695,7 @@
           <a:p>
             <a:r>
               <a:rPr lang="en-GB" sz="2000" dirty="0"/>
-              <a:t>0.4 × 1.6  =</a:t>
+              <a:t>0,4 × 1,6  =</a:t>
             </a:r>
           </a:p>
         </p:txBody>
@@ -5738,7 +5738,7 @@
             <a:pPr algn="ctr"/>
             <a:r>
               <a:rPr lang="en-GB" sz="2000" dirty="0"/>
-              <a:t>0.64</a:t>
+              <a:t>0,64</a:t>
             </a:r>
           </a:p>
         </p:txBody>
@@ -5814,7 +5814,7 @@
           <a:p>
             <a:r>
               <a:rPr lang="en-GB" sz="2000" dirty="0"/>
-              <a:t>1.2 × 1.3  =</a:t>
+              <a:t>1,2 × 1,3  =</a:t>
             </a:r>
           </a:p>
         </p:txBody>
@@ -5857,7 +5857,7 @@
             <a:pPr algn="ctr"/>
             <a:r>
               <a:rPr lang="en-GB" sz="2000" dirty="0"/>
-              <a:t>1.56</a:t>
+              <a:t>1,56</a:t>
             </a:r>
           </a:p>
         </p:txBody>
@@ -5933,7 +5933,7 @@
           <a:p>
             <a:r>
               <a:rPr lang="en-GB" sz="2000" dirty="0"/>
-              <a:t>2.7 × 1.1  =</a:t>
+              <a:t>2,7 × 1,1  =</a:t>
             </a:r>
           </a:p>
         </p:txBody>
@@ -5976,7 +5976,7 @@
             <a:pPr algn="ctr"/>
             <a:r>
               <a:rPr lang="en-GB" sz="2000" dirty="0"/>
-              <a:t>2.97</a:t>
+              <a:t>2,97</a:t>
             </a:r>
           </a:p>
         </p:txBody>
@@ -6093,7 +6093,7 @@
           <a:p>
             <a:r>
               <a:rPr lang="en-GB" sz="2000" dirty="0"/>
-              <a:t>1.2 × 0.7  =</a:t>
+              <a:t>1,2 × 0,7  =</a:t>
             </a:r>
           </a:p>
         </p:txBody>
@@ -6136,7 +6136,7 @@
             <a:pPr algn="ctr"/>
             <a:r>
               <a:rPr lang="en-GB" sz="2000" dirty="0"/>
-              <a:t>0.84</a:t>
+              <a:t>0,84</a:t>
             </a:r>
           </a:p>
         </p:txBody>
@@ -6212,7 +6212,7 @@
           <a:p>
             <a:r>
               <a:rPr lang="en-GB" sz="2000" dirty="0"/>
-              <a:t>1.4 × 1.8  =</a:t>
+              <a:t>1,4 × 1,8  =</a:t>
             </a:r>
           </a:p>
         </p:txBody>
@@ -6255,7 +6255,7 @@
             <a:pPr algn="ctr"/>
             <a:r>
               <a:rPr lang="en-GB" sz="2000" dirty="0"/>
-              <a:t>2.52</a:t>
+              <a:t>2,52</a:t>
             </a:r>
           </a:p>
         </p:txBody>
@@ -6331,7 +6331,7 @@
           <a:p>
             <a:r>
               <a:rPr lang="en-GB" sz="2000" dirty="0"/>
-              <a:t>0.2 × 0.16  =</a:t>
+              <a:t>0,2 × 0,16  =</a:t>
             </a:r>
           </a:p>
         </p:txBody>
@@ -6374,7 +6374,7 @@
             <a:pPr algn="ctr"/>
             <a:r>
               <a:rPr lang="en-GB" sz="2000" dirty="0"/>
-              <a:t>0.032</a:t>
+              <a:t>0,032</a:t>
             </a:r>
           </a:p>
         </p:txBody>
@@ -6450,7 +6450,7 @@
           <a:p>
             <a:r>
               <a:rPr lang="en-GB" sz="2000" dirty="0"/>
-              <a:t>1.6 × 0.05  =</a:t>
+              <a:t>1,6 × 0,05  =</a:t>
             </a:r>
           </a:p>
         </p:txBody>
@@ -6493,7 +6493,7 @@
             <a:pPr algn="ctr"/>
             <a:r>
               <a:rPr lang="en-GB" sz="2000" dirty="0"/>
-              <a:t>0.08</a:t>
+              <a:t>0,08</a:t>
             </a:r>
           </a:p>
         </p:txBody>
@@ -6569,7 +6569,7 @@
           <a:p>
             <a:r>
               <a:rPr lang="en-GB" sz="2000" dirty="0"/>
-              <a:t>2.2 × 0.15  =</a:t>
+              <a:t>2,2 × 0,15  =</a:t>
             </a:r>
           </a:p>
         </p:txBody>
@@ -6612,7 +6612,7 @@
             <a:pPr algn="ctr"/>
             <a:r>
               <a:rPr lang="en-GB" sz="2000" dirty="0"/>
-              <a:t>0.33</a:t>
+              <a:t>0,33</a:t>
             </a:r>
           </a:p>
         </p:txBody>
@@ -6688,7 +6688,7 @@
           <a:p>
             <a:r>
               <a:rPr lang="en-GB" sz="2000" dirty="0"/>
-              <a:t>1.24 × 0.6  =</a:t>
+              <a:t>1,24 × 0,6  =</a:t>
             </a:r>
           </a:p>
         </p:txBody>
@@ -6731,7 +6731,7 @@
             <a:pPr algn="ctr"/>
             <a:r>
               <a:rPr lang="en-GB" sz="2000" dirty="0"/>
-              <a:t>0.744</a:t>
+              <a:t>0,744</a:t>
             </a:r>
           </a:p>
         </p:txBody>
@@ -6807,7 +6807,7 @@
           <a:p>
             <a:r>
               <a:rPr lang="en-GB" sz="2000" dirty="0"/>
-              <a:t>2.21 × 3.5  =</a:t>
+              <a:t>2,21 × 3,5  =</a:t>
             </a:r>
           </a:p>
         </p:txBody>
@@ -6850,7 +6850,7 @@
             <a:pPr algn="ctr"/>
             <a:r>
               <a:rPr lang="en-GB" sz="2000" dirty="0"/>
-              <a:t>7.735</a:t>
+              <a:t>7,735</a:t>
             </a:r>
           </a:p>
         </p:txBody>
